--- a/pptx/temel3.pptx
+++ b/pptx/temel3.pptx
@@ -1840,7 +1840,29 @@
                 <a:ea typeface="Calibri" pitchFamily="34" charset="-122"/>
                 <a:cs typeface="Calibri" pitchFamily="34" charset="-120"/>
               </a:rPr>
-              <a:t>TEMEL SEVİYE • 13-16 YAŞ • KİŞİSEL TARİH VE ZAMAN KODLARI</a:t>
+              <a:t>TEMEL SEVİYE </a:t>
+            </a:r>
+            <a:r>
+              <a:rPr lang="en-US" sz="1500" dirty="0" smtClean="0">
+                <a:solidFill>
+                  <a:srgbClr val="FFFFFF"/>
+                </a:solidFill>
+                <a:latin typeface="Calibri" pitchFamily="34" charset="0"/>
+                <a:ea typeface="Calibri" pitchFamily="34" charset="-122"/>
+                <a:cs typeface="Calibri" pitchFamily="34" charset="-120"/>
+              </a:rPr>
+              <a:t>• </a:t>
+            </a:r>
+            <a:r>
+              <a:rPr lang="en-US" sz="1500" dirty="0">
+                <a:solidFill>
+                  <a:srgbClr val="FFFFFF"/>
+                </a:solidFill>
+                <a:latin typeface="Calibri" pitchFamily="34" charset="0"/>
+                <a:ea typeface="Calibri" pitchFamily="34" charset="-122"/>
+                <a:cs typeface="Calibri" pitchFamily="34" charset="-120"/>
+              </a:rPr>
+              <a:t>KİŞİSEL TARİH VE ZAMAN KODLARI</a:t>
             </a:r>
             <a:endParaRPr lang="en-US" sz="1500" dirty="0"/>
           </a:p>
@@ -2328,7 +2350,7 @@
               <a:t> </a:t>
             </a:r>
             <a:r>
-              <a:rPr lang="tr-TR" sz="1300" b="1">
+              <a:rPr lang="tr-TR" sz="1300" b="1" smtClean="0">
                 <a:solidFill>
                   <a:srgbClr val="FFFFFF"/>
                 </a:solidFill>
@@ -2749,7 +2771,51 @@
                 <a:ea typeface="Calibri" pitchFamily="34" charset="-122"/>
                 <a:cs typeface="Calibri" pitchFamily="34" charset="-120"/>
               </a:rPr>
-              <a:t>2026 TTKD Öğretim Programı — 2. Seviye: 1B3, 3A3; 3. Seviye: 1A2, 1B1, 1B2, 1B3, 3A5</a:t>
+              <a:t>2026 TTKD Öğretim Programı — 2. Seviye: </a:t>
+            </a:r>
+            <a:r>
+              <a:rPr lang="tr-TR" sz="1000" dirty="0" smtClean="0">
+                <a:solidFill>
+                  <a:srgbClr val="94A3B8"/>
+                </a:solidFill>
+                <a:latin typeface="Calibri" pitchFamily="34" charset="0"/>
+                <a:ea typeface="Calibri" pitchFamily="34" charset="-122"/>
+                <a:cs typeface="Calibri" pitchFamily="34" charset="-120"/>
+              </a:rPr>
+              <a:t>3A3</a:t>
+            </a:r>
+            <a:r>
+              <a:rPr lang="tr-TR" sz="1000" dirty="0">
+                <a:solidFill>
+                  <a:srgbClr val="94A3B8"/>
+                </a:solidFill>
+                <a:latin typeface="Calibri" pitchFamily="34" charset="0"/>
+                <a:ea typeface="Calibri" pitchFamily="34" charset="-122"/>
+                <a:cs typeface="Calibri" pitchFamily="34" charset="-120"/>
+              </a:rPr>
+              <a:t>; 3. Seviye: 1A2, 1B1, </a:t>
+            </a:r>
+            <a:r>
+              <a:rPr lang="tr-TR" sz="1000" dirty="0" smtClean="0">
+                <a:solidFill>
+                  <a:srgbClr val="94A3B8"/>
+                </a:solidFill>
+                <a:latin typeface="Calibri" pitchFamily="34" charset="0"/>
+                <a:ea typeface="Calibri" pitchFamily="34" charset="-122"/>
+                <a:cs typeface="Calibri" pitchFamily="34" charset="-120"/>
+              </a:rPr>
+              <a:t>1B3</a:t>
+            </a:r>
+            <a:r>
+              <a:rPr lang="tr-TR" sz="1000" dirty="0">
+                <a:solidFill>
+                  <a:srgbClr val="94A3B8"/>
+                </a:solidFill>
+                <a:latin typeface="Calibri" pitchFamily="34" charset="0"/>
+                <a:ea typeface="Calibri" pitchFamily="34" charset="-122"/>
+                <a:cs typeface="Calibri" pitchFamily="34" charset="-120"/>
+              </a:rPr>
+              <a:t>, 3A5</a:t>
             </a:r>
           </a:p>
         </p:txBody>
@@ -5313,7 +5379,7 @@
               <a:buNone/>
             </a:pPr>
             <a:r>
-              <a:rPr lang="en-US" sz="1700" b="1" dirty="0" err="1">
+              <a:rPr lang="en-US" sz="1700" b="1" dirty="0" err="1" smtClean="0">
                 <a:solidFill>
                   <a:srgbClr val="1A2E5A"/>
                 </a:solidFill>
@@ -5484,7 +5550,7 @@
               <a:buNone/>
             </a:pPr>
             <a:r>
-              <a:rPr lang="en-US" sz="1600" i="1" dirty="0">
+              <a:rPr lang="en-US" sz="1600" i="1" dirty="0" smtClean="0">
                 <a:solidFill>
                   <a:srgbClr val="1E293B"/>
                 </a:solidFill>
@@ -7463,106 +7529,7 @@
                 <a:ea typeface="Calibri" pitchFamily="34" charset="-122"/>
                 <a:cs typeface="Calibri" pitchFamily="34" charset="-120"/>
               </a:rPr>
-              <a:t>Bizden büyük </a:t>
-            </a:r>
-            <a:r>
-              <a:rPr lang="en-US" sz="1350" dirty="0" err="1">
-                <a:solidFill>
-                  <a:srgbClr val="1E293B"/>
-                </a:solidFill>
-                <a:latin typeface="Calibri" pitchFamily="34" charset="0"/>
-                <a:ea typeface="Calibri" pitchFamily="34" charset="-122"/>
-                <a:cs typeface="Calibri" pitchFamily="34" charset="-120"/>
-              </a:rPr>
-              <a:t>gençlere</a:t>
-            </a:r>
-            <a:r>
-              <a:rPr lang="en-US" sz="1350" dirty="0">
-                <a:solidFill>
-                  <a:srgbClr val="1E293B"/>
-                </a:solidFill>
-                <a:latin typeface="Calibri" pitchFamily="34" charset="0"/>
-                <a:ea typeface="Calibri" pitchFamily="34" charset="-122"/>
-                <a:cs typeface="Calibri" pitchFamily="34" charset="-120"/>
-              </a:rPr>
-              <a:t> “Abi/Abla”, </a:t>
-            </a:r>
-            <a:r>
-              <a:rPr lang="en-US" sz="1350" dirty="0" err="1">
-                <a:solidFill>
-                  <a:srgbClr val="1E293B"/>
-                </a:solidFill>
-                <a:latin typeface="Calibri" pitchFamily="34" charset="0"/>
-                <a:ea typeface="Calibri" pitchFamily="34" charset="-122"/>
-                <a:cs typeface="Calibri" pitchFamily="34" charset="-120"/>
-              </a:rPr>
-              <a:t>yetişkinlere</a:t>
-            </a:r>
-            <a:r>
-              <a:rPr lang="en-US" sz="1350" dirty="0">
-                <a:solidFill>
-                  <a:srgbClr val="1E293B"/>
-                </a:solidFill>
-                <a:latin typeface="Calibri" pitchFamily="34" charset="0"/>
-                <a:ea typeface="Calibri" pitchFamily="34" charset="-122"/>
-                <a:cs typeface="Calibri" pitchFamily="34" charset="-120"/>
-              </a:rPr>
-              <a:t> “</a:t>
-            </a:r>
-            <a:r>
-              <a:rPr lang="en-US" sz="1350" dirty="0" err="1">
-                <a:solidFill>
-                  <a:srgbClr val="1E293B"/>
-                </a:solidFill>
-                <a:latin typeface="Calibri" pitchFamily="34" charset="0"/>
-                <a:ea typeface="Calibri" pitchFamily="34" charset="-122"/>
-                <a:cs typeface="Calibri" pitchFamily="34" charset="-120"/>
-              </a:rPr>
-              <a:t>Amca</a:t>
-            </a:r>
-            <a:r>
-              <a:rPr lang="en-US" sz="1350" dirty="0">
-                <a:solidFill>
-                  <a:srgbClr val="1E293B"/>
-                </a:solidFill>
-                <a:latin typeface="Calibri" pitchFamily="34" charset="0"/>
-                <a:ea typeface="Calibri" pitchFamily="34" charset="-122"/>
-                <a:cs typeface="Calibri" pitchFamily="34" charset="-120"/>
-              </a:rPr>
-              <a:t>/</a:t>
-            </a:r>
-            <a:r>
-              <a:rPr lang="en-US" sz="1350" dirty="0" err="1">
-                <a:solidFill>
-                  <a:srgbClr val="1E293B"/>
-                </a:solidFill>
-                <a:latin typeface="Calibri" pitchFamily="34" charset="0"/>
-                <a:ea typeface="Calibri" pitchFamily="34" charset="-122"/>
-                <a:cs typeface="Calibri" pitchFamily="34" charset="-120"/>
-              </a:rPr>
-              <a:t>Teyze</a:t>
-            </a:r>
-            <a:r>
-              <a:rPr lang="en-US" sz="1350">
-                <a:solidFill>
-                  <a:srgbClr val="1E293B"/>
-                </a:solidFill>
-                <a:latin typeface="Calibri" pitchFamily="34" charset="0"/>
-                <a:ea typeface="Calibri" pitchFamily="34" charset="-122"/>
-                <a:cs typeface="Calibri" pitchFamily="34" charset="-120"/>
-              </a:rPr>
-              <a:t>” </a:t>
-            </a:r>
-            <a:r>
-              <a:rPr lang="en-US" sz="1350" dirty="0">
-                <a:solidFill>
-                  <a:srgbClr val="1E293B"/>
-                </a:solidFill>
-                <a:latin typeface="Calibri" pitchFamily="34" charset="0"/>
-                <a:ea typeface="Calibri" pitchFamily="34" charset="-122"/>
-                <a:cs typeface="Calibri" pitchFamily="34" charset="-120"/>
-              </a:rPr>
-              <a:t>deriz. Akranlarımıza sadece ismiyle sesleniriz.</a:t>
+              <a:t>Bizden büyük gençlere Abi/Abla, yetişkinlere Amca/Teyze deriz. Akranlarımıza sadece ismiyle sesleniriz.</a:t>
             </a:r>
             <a:endParaRPr lang="en-US" sz="1350" dirty="0"/>
           </a:p>
